--- a/PPK_Gov_Presentation_RU.pptx
+++ b/PPK_Gov_Presentation_RU.pptx
@@ -13366,7 +13366,7 @@
                 <a:ea typeface="Calibri" pitchFamily="34" charset="-122"/>
                 <a:cs typeface="Calibri" pitchFamily="34" charset="-120"/>
               </a:rPr>
-              <a:t>ПРОВЕРКА ПОДРЯДЧИКОВ</a:t>
+              <a:t>ФИНАНСОВАЯ МОДЕЛЬ</a:t>
             </a:r>
             <a:endParaRPr lang="en-US" sz="1000" dirty="0"/>
           </a:p>
@@ -13405,7 +13405,7 @@
                 <a:ea typeface="Calibri" pitchFamily="34" charset="-122"/>
                 <a:cs typeface="Calibri" pitchFamily="34" charset="-120"/>
               </a:rPr>
-              <a:t>Три уровня доверия</a:t>
+              <a:t>Депонирование, этапы</a:t>
             </a:r>
             <a:r>
               <a:rPr lang="en-US" sz="3000" b="1" dirty="0">
@@ -13416,7 +13416,7 @@
                 <a:ea typeface="Calibri" pitchFamily="34" charset="-122"/>
                 <a:cs typeface="Calibri" pitchFamily="34" charset="-120"/>
               </a:rPr>
-              <a:t> + независимая экспертная оценка</a:t>
+              <a:t> и прозрачная комиссия</a:t>
             </a:r>
             <a:endParaRPr lang="en-US" sz="3000" dirty="0"/>
           </a:p>
@@ -13523,7 +13523,7 @@
                 <a:ea typeface="Calibri" pitchFamily="34" charset="-122"/>
                 <a:cs typeface="Calibri" pitchFamily="34" charset="-120"/>
               </a:rPr>
-              <a:t>Личность</a:t>
+              <a:t>Депонирование</a:t>
             </a:r>
             <a:endParaRPr lang="en-US" sz="1200" dirty="0"/>
           </a:p>
@@ -13562,7 +13562,7 @@
                 <a:ea typeface="Calibri" pitchFamily="34" charset="-122"/>
                 <a:cs typeface="Calibri" pitchFamily="34" charset="-120"/>
               </a:rPr>
-              <a:t>Паспорт, одноразовый код, почта</a:t>
+              <a:t>Заказчик резервирует средства при найме</a:t>
             </a:r>
             <a:endParaRPr lang="en-US" sz="900" dirty="0"/>
           </a:p>
@@ -13669,7 +13669,7 @@
                 <a:ea typeface="Calibri" pitchFamily="34" charset="-122"/>
                 <a:cs typeface="Calibri" pitchFamily="34" charset="-120"/>
               </a:rPr>
-              <a:t>Документы</a:t>
+              <a:t>Этапы</a:t>
             </a:r>
             <a:endParaRPr lang="en-US" sz="1200" dirty="0"/>
           </a:p>
@@ -13708,7 +13708,7 @@
                 <a:ea typeface="Calibri" pitchFamily="34" charset="-122"/>
                 <a:cs typeface="Calibri" pitchFamily="34" charset="-120"/>
               </a:rPr>
-              <a:t>СРО, НОПРИЗ, НОСТРОЙ</a:t>
+              <a:t>Проект делится на 1-5 этапов</a:t>
             </a:r>
             <a:endParaRPr lang="en-US" sz="900" dirty="0"/>
           </a:p>
@@ -13815,7 +13815,7 @@
                 <a:ea typeface="Calibri" pitchFamily="34" charset="-122"/>
                 <a:cs typeface="Calibri" pitchFamily="34" charset="-120"/>
               </a:rPr>
-              <a:t>Портфолио</a:t>
+              <a:t>Выплата</a:t>
             </a:r>
             <a:endParaRPr lang="en-US" sz="1200" dirty="0"/>
           </a:p>
@@ -13854,7 +13854,7 @@
                 <a:ea typeface="Calibri" pitchFamily="34" charset="-122"/>
                 <a:cs typeface="Calibri" pitchFamily="34" charset="-120"/>
               </a:rPr>
-              <a:t>Экспертная оценка</a:t>
+              <a:t>После закрытия этапа: исполнителю минус комиссия</a:t>
             </a:r>
             <a:endParaRPr lang="en-US" sz="900" dirty="0"/>
           </a:p>
@@ -13961,7 +13961,7 @@
                 <a:ea typeface="Calibri" pitchFamily="34" charset="-122"/>
                 <a:cs typeface="Calibri" pitchFamily="34" charset="-120"/>
               </a:rPr>
-              <a:t>Квалификация</a:t>
+              <a:t>Спор</a:t>
             </a:r>
             <a:endParaRPr lang="en-US" sz="1200" dirty="0"/>
           </a:p>
@@ -14000,7 +14000,7 @@
                 <a:ea typeface="Calibri" pitchFamily="34" charset="-122"/>
                 <a:cs typeface="Calibri" pitchFamily="34" charset="-120"/>
               </a:rPr>
-              <a:t>Профессиональная проверка</a:t>
+              <a:t>100% суммы этапа замораживается до решения</a:t>
             </a:r>
             <a:endParaRPr lang="en-US" sz="900" dirty="0"/>
           </a:p>
@@ -14039,7 +14039,7 @@
                 <a:ea typeface="Calibri" pitchFamily="34" charset="-122"/>
                 <a:cs typeface="Calibri" pitchFamily="34" charset="-120"/>
               </a:rPr>
-              <a:t>КВАЛИФИКАЦИОННЫЕ УРОВНИ (ПО ЕКС)</a:t>
+              <a:t>КОМИССИОННАЯ ЛОГИКА</a:t>
             </a:r>
             <a:endParaRPr lang="en-US" sz="900" dirty="0"/>
           </a:p>
@@ -14112,7 +14112,7 @@
                 <a:ea typeface="Calibri" pitchFamily="34" charset="-122"/>
                 <a:cs typeface="Calibri" pitchFamily="34" charset="-120"/>
               </a:rPr>
-              <a:t>Младший</a:t>
+              <a:t>0-1 млн</a:t>
             </a:r>
             <a:endParaRPr lang="en-US" sz="900" dirty="0"/>
           </a:p>
@@ -14185,7 +14185,7 @@
                 <a:ea typeface="Calibri" pitchFamily="34" charset="-122"/>
                 <a:cs typeface="Calibri" pitchFamily="34" charset="-120"/>
               </a:rPr>
-              <a:t>Инж. III</a:t>
+              <a:t>1-5 млн</a:t>
             </a:r>
             <a:endParaRPr lang="en-US" sz="900" dirty="0"/>
           </a:p>
@@ -14258,7 +14258,7 @@
                 <a:ea typeface="Calibri" pitchFamily="34" charset="-122"/>
                 <a:cs typeface="Calibri" pitchFamily="34" charset="-120"/>
               </a:rPr>
-              <a:t>Инж. II</a:t>
+              <a:t>5 млн+</a:t>
             </a:r>
             <a:endParaRPr lang="en-US" sz="900" dirty="0"/>
           </a:p>
@@ -14331,7 +14331,7 @@
                 <a:ea typeface="Calibri" pitchFamily="34" charset="-122"/>
                 <a:cs typeface="Calibri" pitchFamily="34" charset="-120"/>
               </a:rPr>
-              <a:t>Инж. I</a:t>
+              <a:t>15%</a:t>
             </a:r>
             <a:endParaRPr lang="en-US" sz="900" dirty="0"/>
           </a:p>
@@ -14404,7 +14404,7 @@
                 <a:ea typeface="Calibri" pitchFamily="34" charset="-122"/>
                 <a:cs typeface="Calibri" pitchFamily="34" charset="-120"/>
               </a:rPr>
-              <a:t>Ведущий</a:t>
+              <a:t>12%</a:t>
             </a:r>
             <a:endParaRPr lang="en-US" sz="900" dirty="0"/>
           </a:p>
@@ -14477,7 +14477,7 @@
                 <a:ea typeface="Calibri" pitchFamily="34" charset="-122"/>
                 <a:cs typeface="Calibri" pitchFamily="34" charset="-120"/>
               </a:rPr>
-              <a:t>ГИП / ГАП</a:t>
+              <a:t>8%</a:t>
             </a:r>
             <a:endParaRPr lang="en-US" sz="900" dirty="0"/>
           </a:p>
@@ -14516,7 +14516,7 @@
                 <a:ea typeface="Calibri" pitchFamily="34" charset="-122"/>
                 <a:cs typeface="Calibri" pitchFamily="34" charset="-120"/>
               </a:rPr>
-              <a:t>КОНТРОЛЬ КАЧЕСТВА ПРОВЕРКИ</a:t>
+              <a:t>ПРАВИЛА ПЛАТЕЖЕЙ</a:t>
             </a:r>
             <a:endParaRPr lang="en-US" sz="900" dirty="0"/>
           </a:p>
@@ -14621,7 +14621,7 @@
                 <a:ea typeface="Calibri" pitchFamily="34" charset="-122"/>
                 <a:cs typeface="Calibri" pitchFamily="34" charset="-120"/>
               </a:rPr>
-              <a:t>Стандартные чек-листы и декларация конфликта интересов</a:t>
+              <a:t>Валюта на старте: ₽</a:t>
             </a:r>
             <a:endParaRPr lang="en-US" sz="1100" dirty="0"/>
           </a:p>
@@ -14726,7 +14726,7 @@
                 <a:ea typeface="Calibri" pitchFamily="34" charset="-122"/>
                 <a:cs typeface="Calibri" pitchFamily="34" charset="-120"/>
               </a:rPr>
-              <a:t>Повторная проверка 5% случайных решений</a:t>
+              <a:t>Авто-приёмка этапа через 7 дней без реакции заказчика</a:t>
             </a:r>
             <a:endParaRPr lang="en-US" sz="1100" dirty="0"/>
           </a:p>
@@ -14831,7 +14831,7 @@
                 <a:ea typeface="Calibri" pitchFamily="34" charset="-122"/>
                 <a:cs typeface="Calibri" pitchFamily="34" charset="-120"/>
               </a:rPr>
-              <a:t>Двухуровневая проверка для сделок с высоким риском</a:t>
+              <a:t>После 14 дней вопрос передаётся администратору</a:t>
             </a:r>
             <a:endParaRPr lang="en-US" sz="1100" dirty="0"/>
           </a:p>
@@ -14936,7 +14936,7 @@
                 <a:ea typeface="Calibri" pitchFamily="34" charset="-122"/>
                 <a:cs typeface="Calibri" pitchFamily="34" charset="-120"/>
               </a:rPr>
-              <a:t>Обжалование решения у другого эксперта или администратора</a:t>
+              <a:t>Развитие монетизации: платные сервисы и дополнительные опции после запуска</a:t>
             </a:r>
             <a:endParaRPr lang="en-US" sz="1100" dirty="0"/>
           </a:p>
@@ -14975,7 +14975,7 @@
                 <a:ea typeface="Calibri" pitchFamily="34" charset="-122"/>
                 <a:cs typeface="Calibri" pitchFamily="34" charset="-120"/>
               </a:rPr>
-              <a:t>Профиль с индексом доверия 90 и экспертным баллом 94, отметками о проверке и подтверждениями.</a:t>
+              <a:t>Комиссия может оплачиваться заказчиком — это повышает чистую ставку проектировщика.</a:t>
             </a:r>
             <a:endParaRPr lang="en-US" sz="1000" dirty="0"/>
           </a:p>
@@ -15296,7 +15296,7 @@
                 <a:ea typeface="Calibri" pitchFamily="34" charset="-122"/>
                 <a:cs typeface="Calibri" pitchFamily="34" charset="-120"/>
               </a:rPr>
-              <a:t>05 / 16</a:t>
+              <a:t>05 / 12</a:t>
             </a:r>
             <a:endParaRPr lang="en-US" sz="1000" dirty="0"/>
           </a:p>
@@ -15362,7 +15362,7 @@
                 <a:ea typeface="Calibri" pitchFamily="34" charset="-122"/>
                 <a:cs typeface="Calibri" pitchFamily="34" charset="-120"/>
               </a:rPr>
-              <a:t>КАБИНЕТ ЭКСПЕРТА</a:t>
+              <a:t>ТАРИФЫ И КОМИССИИ</a:t>
             </a:r>
             <a:endParaRPr lang="en-US" sz="1000" dirty="0"/>
           </a:p>
@@ -15401,7 +15401,7 @@
                 <a:ea typeface="Calibri" pitchFamily="34" charset="-122"/>
                 <a:cs typeface="Calibri" pitchFamily="34" charset="-120"/>
               </a:rPr>
-              <a:t>Очередь проверок:</a:t>
+              <a:t>Комиссия зависит от оборота</a:t>
             </a:r>
             <a:r>
               <a:rPr lang="en-US" sz="3000" b="1" dirty="0">
@@ -15412,7 +15412,7 @@
                 <a:ea typeface="Calibri" pitchFamily="34" charset="-122"/>
                 <a:cs typeface="Calibri" pitchFamily="34" charset="-120"/>
               </a:rPr>
-              <a:t> контроль сроков и качества решений</a:t>
+              <a:t> пользователя за 12 месяцев</a:t>
             </a:r>
             <a:endParaRPr lang="en-US" sz="3000" dirty="0"/>
           </a:p>
@@ -15506,7 +15506,7 @@
                 <a:ea typeface="Calibri" pitchFamily="34" charset="-122"/>
                 <a:cs typeface="Calibri" pitchFamily="34" charset="-120"/>
               </a:rPr>
-              <a:t>Очередь проверок эксперта: тип проверки, заявитель, контекст, приоритет, срок.</a:t>
+              <a:t>Деньги проходят через условное депонирование: заказчик резервирует оплату, этапы закрываются прозрачно, спорная сумма блокируется до решения.</a:t>
             </a:r>
             <a:endParaRPr lang="en-US" sz="950" dirty="0"/>
           </a:p>
@@ -15545,7 +15545,7 @@
                 <a:ea typeface="Calibri" pitchFamily="34" charset="-122"/>
                 <a:cs typeface="Calibri" pitchFamily="34" charset="-120"/>
               </a:rPr>
-              <a:t>ЧТО ДЕЛАЕТ ЭКСПЕРТ</a:t>
+              <a:t>СТАВКИ КОМИССИИ</a:t>
             </a:r>
             <a:endParaRPr lang="en-US" sz="900" dirty="0"/>
           </a:p>
@@ -15650,7 +15650,7 @@
                 <a:ea typeface="Calibri" pitchFamily="34" charset="-122"/>
                 <a:cs typeface="Calibri" pitchFamily="34" charset="-120"/>
               </a:rPr>
-              <a:t>Проверяет профиль и портфолио</a:t>
+              <a:t>0-1 млн ₽ за 12 месяцев — 15%</a:t>
             </a:r>
             <a:endParaRPr lang="en-US" sz="1100" dirty="0"/>
           </a:p>
@@ -15755,7 +15755,7 @@
                 <a:ea typeface="Calibri" pitchFamily="34" charset="-122"/>
                 <a:cs typeface="Calibri" pitchFamily="34" charset="-120"/>
               </a:rPr>
-              <a:t>Подтверждает документы СРО</a:t>
+              <a:t>1-5 млн ₽ за 12 месяцев — 12%</a:t>
             </a:r>
             <a:endParaRPr lang="en-US" sz="1100" dirty="0"/>
           </a:p>
@@ -15860,7 +15860,7 @@
                 <a:ea typeface="Calibri" pitchFamily="34" charset="-122"/>
                 <a:cs typeface="Calibri" pitchFamily="34" charset="-120"/>
               </a:rPr>
-              <a:t>Оценивает заявки на повышение уровня</a:t>
+              <a:t>5 млн ₽+ за 12 месяцев — 8%</a:t>
             </a:r>
             <a:endParaRPr lang="en-US" sz="1100" dirty="0"/>
           </a:p>
@@ -15965,7 +15965,7 @@
                 <a:ea typeface="Calibri" pitchFamily="34" charset="-122"/>
                 <a:cs typeface="Calibri" pitchFamily="34" charset="-120"/>
               </a:rPr>
-              <a:t>Проверяет кейсы и BIM-работы</a:t>
+              <a:t>Опция: комиссию может оплачивать заказчик</a:t>
             </a:r>
             <a:endParaRPr lang="en-US" sz="1100" dirty="0"/>
           </a:p>
@@ -16070,7 +16070,7 @@
                 <a:ea typeface="Calibri" pitchFamily="34" charset="-122"/>
                 <a:cs typeface="Calibri" pitchFamily="34" charset="-120"/>
               </a:rPr>
-              <a:t>Проводит профильное интервью</a:t>
+              <a:t>Развитие монетизации остаётся отдельным направлением после запуска</a:t>
             </a:r>
             <a:endParaRPr lang="en-US" sz="1100" dirty="0"/>
           </a:p>
@@ -16143,7 +16143,7 @@
                 <a:ea typeface="Calibri" pitchFamily="34" charset="-122"/>
                 <a:cs typeface="Calibri" pitchFamily="34" charset="-120"/>
               </a:rPr>
-              <a:t>ПОКАЗАТЕЛИ</a:t>
+              <a:t>КОНТРОЛЬ</a:t>
             </a:r>
             <a:endParaRPr lang="en-US" sz="900" dirty="0"/>
           </a:p>
@@ -16182,7 +16182,7 @@
                 <a:ea typeface="Calibri" pitchFamily="34" charset="-122"/>
                 <a:cs typeface="Calibri" pitchFamily="34" charset="-120"/>
               </a:rPr>
-              <a:t>47</a:t>
+              <a:t>7 дней</a:t>
             </a:r>
             <a:r>
               <a:rPr lang="en-US" sz="1000" dirty="0">
@@ -16193,8 +16193,7 @@
                 <a:ea typeface="Calibri" pitchFamily="34" charset="-122"/>
                 <a:cs typeface="Calibri" pitchFamily="34" charset="-120"/>
               </a:rPr>
-              <a:t>  решено за 30 дней
-</a:t>
+              <a:t>  авто-приёмка этапа</a:t>
             </a:r>
             <a:r>
               <a:rPr lang="en-US" sz="2000" b="1" dirty="0">
@@ -16205,7 +16204,7 @@
                 <a:ea typeface="Calibri" pitchFamily="34" charset="-122"/>
                 <a:cs typeface="Calibri" pitchFamily="34" charset="-120"/>
               </a:rPr>
-              <a:t>71%</a:t>
+              <a:t>14 дней</a:t>
             </a:r>
             <a:r>
               <a:rPr lang="en-US" sz="1000" dirty="0">
@@ -16216,7 +16215,7 @@
                 <a:ea typeface="Calibri" pitchFamily="34" charset="-122"/>
                 <a:cs typeface="Calibri" pitchFamily="34" charset="-120"/>
               </a:rPr>
-              <a:t>  процент одобрения</a:t>
+              <a:t>  передача администратору</a:t>
             </a:r>
             <a:endParaRPr lang="en-US" sz="2000" dirty="0"/>
           </a:p>
